--- a/final-deck/從碳客變捷客_決賽簡報_v3.pptx
+++ b/final-deck/從碳客變捷客_決賽簡報_v3.pptx
@@ -19483,7 +19483,7 @@
                 <a:latin typeface="微軟正黑體"/>
                 <a:ea typeface="微軟正黑體"/>
               </a:rPr>
-              <a:t>+18 點 / +0.23 kg</a:t>
+              <a:t>+15 點 / +0.23 kg</a:t>
             </a:r>
           </a:p>
           <a:p>
@@ -22238,7 +22238,7 @@
                 <a:latin typeface="微軟正黑體"/>
                 <a:ea typeface="微軟正黑體"/>
               </a:rPr>
-              <a:t>入場運動 +25 點</a:t>
+              <a:t>入場運動 充能 +85% (孵化汗汗)</a:t>
             </a:r>
           </a:p>
         </p:txBody>
@@ -22529,7 +22529,7 @@
                 <a:latin typeface="微軟正黑體"/>
                 <a:ea typeface="微軟正黑體"/>
               </a:rPr>
-              <a:t>出站補 2,000 步 +20 點</a:t>
+              <a:t>出站步行 2,000 步 充能 +65%</a:t>
             </a:r>
           </a:p>
         </p:txBody>
@@ -22820,7 +22820,7 @@
                 <a:latin typeface="微軟正黑體"/>
                 <a:ea typeface="微軟正黑體"/>
               </a:rPr>
-              <a:t>捷運後 1–2 km 接駁 +12 點</a:t>
+              <a:t>捷運接駁 10分鐘 充能 +35%</a:t>
             </a:r>
           </a:p>
         </p:txBody>
@@ -23111,7 +23111,7 @@
                 <a:latin typeface="微軟正黑體"/>
                 <a:ea typeface="微軟正黑體"/>
               </a:rPr>
-              <a:t>雨天出站借傘 +5 點</a:t>
+              <a:t>雨天出站借傘 +5 捷運點</a:t>
             </a:r>
           </a:p>
         </p:txBody>
@@ -23402,7 +23402,7 @@
                 <a:latin typeface="微軟正黑體"/>
                 <a:ea typeface="微軟正黑體"/>
               </a:rPr>
-              <a:t>共享行動電源 +5 點</a:t>
+              <a:t>共享行動電源 +5 捷運點</a:t>
             </a:r>
           </a:p>
         </p:txBody>
